--- a/Presentacion_Socio_COTA_App.pptx
+++ b/Presentacion_Socio_COTA_App.pptx
@@ -3134,7 +3134,7 @@
               </a:defRPr>
             </a:pPr>
             <a:r>
-              <a:t>01 // VISIÓN &amp; OPORTUNIDAD DE NEGOCIO</a:t>
+              <a:t>01 // VISIÓN Y OPORTUNIDAD DE NEGOCIO</a:t>
             </a:r>
           </a:p>
         </p:txBody>
@@ -3162,7 +3162,7 @@
           <a:lstStyle/>
           <a:p>
             <a:pPr>
-              <a:defRPr sz="2100" b="1">
+              <a:defRPr sz="2000" b="1">
                 <a:solidFill>
                   <a:srgbClr val="262320"/>
                 </a:solidFill>
@@ -3170,7 +3170,7 @@
               </a:defRPr>
             </a:pPr>
             <a:r>
-              <a:t>COTA APP: Sistema Operativo para Estudios de Arquitectura e Interiorismo</a:t>
+              <a:t>COTA APP: Plataforma de Gestión para Proyectos de Diseño y Remodelación</a:t>
             </a:r>
           </a:p>
         </p:txBody>
@@ -3225,7 +3225,7 @@
               </a:defRPr>
             </a:pPr>
             <a:r>
-              <a:t>MVP v2.0 ACTIVO</a:t>
+              <a:t>VERSIÓN v2.0</a:t>
             </a:r>
           </a:p>
         </p:txBody>
@@ -3411,7 +3411,7 @@
               </a:defRPr>
             </a:pPr>
             <a:r>
-              <a:t>▪  El 90% de estudios pequeños y medianos operan fragmentados entre hojas de Excel sueltas, WhatsApp y Drive.</a:t>
+              <a:t>▪  La mayoría de estudios de diseño y remodelación manejan su operación dispersa entre hojas de Excel sueltas, WhatsApp y carpetas en la nube.</a:t>
             </a:r>
           </a:p>
           <a:p>
@@ -3427,7 +3427,7 @@
               </a:defRPr>
             </a:pPr>
             <a:r>
-              <a:t>▪  Descontrol en compras FF&amp;E por ambiente: presupuestos que se desfasan sin trazabilidad.</a:t>
+              <a:t>▪  Descontrol en compras de materiales y mobiliario: los presupuestos por habitación se desfasan sin detectarlo a tiempo.</a:t>
             </a:r>
           </a:p>
           <a:p>
@@ -3443,7 +3443,7 @@
               </a:defRPr>
             </a:pPr>
             <a:r>
-              <a:t>▪  Ceguera financiera: no se conoce la liquidez real ni el saldo exacto por contratista hasta cerrar la obra.</a:t>
+              <a:t>▪  Falta de claridad financiera: no se conoce la ganancia real ni el saldo pendiente con cada proveedor hasta terminar la obra.</a:t>
             </a:r>
           </a:p>
           <a:p>
@@ -3459,7 +3459,7 @@
               </a:defRPr>
             </a:pPr>
             <a:r>
-              <a:t>▪  Herramientas genéricas (Notion, Trello, Monday) no manejan partidas de obra, FF&amp;E ni actas técnicas.</a:t>
+              <a:t>▪  Las apps genéricas de tareas (Notion, Trello, Monday) no sirven para controlar presupuestos de obra, compras por ambiente ni actas formales.</a:t>
             </a:r>
           </a:p>
         </p:txBody>
@@ -3602,7 +3602,7 @@
               </a:defRPr>
             </a:pPr>
             <a:r>
-              <a:t>▪  Plataforma integral 'All-in-One' creada específicamente para el flujo de Arquitectura, Diseño Interior y Obra.</a:t>
+              <a:t>▪  Sistema todo-en-uno diseñado para controlar un proyecto completo desde la idea inicial hasta la entrega final al cliente.</a:t>
             </a:r>
           </a:p>
           <a:p>
@@ -3618,7 +3618,7 @@
               </a:defRPr>
             </a:pPr>
             <a:r>
-              <a:t>▪  Conecta las 8 fases de diseño, catálogo FF&amp;E por ambiente, planos, contratistas, cobros y actas en PDF.</a:t>
+              <a:t>▪  Conecta las 8 etapas de diseño, el catálogo de materiales y muebles por habitación, los planos, los pagos a trabajadores, los cobros y las actas en PDF.</a:t>
             </a:r>
           </a:p>
           <a:p>
@@ -3634,7 +3634,7 @@
               </a:defRPr>
             </a:pPr>
             <a:r>
-              <a:t>▪  Identidad visual editorial 'Warm Architectural Atelier' que eleva la imagen del estudio ante clientes VIP.</a:t>
+              <a:t>▪  Diseño visual limpio y ejecutivo que eleva la imagen profesional de la empresa frente a los clientes.</a:t>
             </a:r>
           </a:p>
           <a:p>
@@ -3650,7 +3650,7 @@
               </a:defRPr>
             </a:pPr>
             <a:r>
-              <a:t>▪  Sincronización híbrida en tiempo real con Google Sheets en la nube + respaldo directo en Excel (.xlsx).</a:t>
+              <a:t>▪  Guardado en tiempo real en la nube (Google Sheets) con respaldo directo en archivos Excel (.xlsx) en Google Drive.</a:t>
             </a:r>
           </a:p>
         </p:txBody>
@@ -3793,7 +3793,7 @@
               </a:defRPr>
             </a:pPr>
             <a:r>
-              <a:t>▪  USO INTERNO INMEDIATO: Estandarizar el 100% de proyectos del estudio, blindando el margen operativo y ahorrando horas de gestión.</a:t>
+              <a:t>▪  USO INTERNO INMEDIATO: Ordenar el 100% de nuestros proyectos activos, protegiendo el margen de ganancia y ahorrando horas administrativas.</a:t>
             </a:r>
           </a:p>
           <a:p>
@@ -3809,7 +3809,7 @@
               </a:defRPr>
             </a:pPr>
             <a:r>
-              <a:t>▪  ESCALABILIDAD SAAS B2B: Arquitectura multi-socio lista para comercializar por suscripción a otros estudios de arquitectura e interiorismo.</a:t>
+              <a:t>▪  MODELO DE SUSCRIPCIÓN (SaaS): El sistema está listo para poder alquilarlo mensualmente a otros estudios de diseño, arquitectura y remodelación.</a:t>
             </a:r>
           </a:p>
           <a:p>
@@ -3825,7 +3825,7 @@
               </a:defRPr>
             </a:pPr>
             <a:r>
-              <a:t>▪  Producto funcional hoy mismo: 6 módulos globales de estudio + 8 módulos por proyecto ya operativos.</a:t>
+              <a:t>▪  Producto 100% operativo hoy: 6 vistas generales de la empresa + 8 módulos detallados por cada proyecto.</a:t>
             </a:r>
           </a:p>
         </p:txBody>
@@ -3879,7 +3879,7 @@
               </a:defRPr>
             </a:pPr>
             <a:r>
-              <a:t>01. BRIEF &amp; FASES</a:t>
+              <a:t>01. CRONOGRAMA</a:t>
             </a:r>
           </a:p>
           <a:p>
@@ -3891,7 +3891,7 @@
               </a:defRPr>
             </a:pPr>
             <a:r>
-              <a:t>8 Etapas + Gantt</a:t>
+              <a:t>Las 8 etapas de avance</a:t>
             </a:r>
           </a:p>
         </p:txBody>
@@ -3945,7 +3945,7 @@
               </a:defRPr>
             </a:pPr>
             <a:r>
-              <a:t>02. CATÁLOGO FF&amp;E</a:t>
+              <a:t>02. MATERIALES</a:t>
             </a:r>
           </a:p>
           <a:p>
@@ -3957,7 +3957,7 @@
               </a:defRPr>
             </a:pPr>
             <a:r>
-              <a:t>Costos por Ambiente</a:t>
+              <a:t>Compras por habitación</a:t>
             </a:r>
           </a:p>
         </p:txBody>
@@ -4011,7 +4011,7 @@
               </a:defRPr>
             </a:pPr>
             <a:r>
-              <a:t>03. PLANOS &amp; REV.</a:t>
+              <a:t>03. PLANOS Y 3D</a:t>
             </a:r>
           </a:p>
           <a:p>
@@ -4023,7 +4023,7 @@
               </a:defRPr>
             </a:pPr>
             <a:r>
-              <a:t>Control Expediente</a:t>
+              <a:t>Control de versiones</a:t>
             </a:r>
           </a:p>
         </p:txBody>
@@ -4077,7 +4077,7 @@
               </a:defRPr>
             </a:pPr>
             <a:r>
-              <a:t>04. OBRA &amp; PARTIDAS</a:t>
+              <a:t>04. OBRA Y EQUIPO</a:t>
             </a:r>
           </a:p>
           <a:p>
@@ -4089,7 +4089,7 @@
               </a:defRPr>
             </a:pPr>
             <a:r>
-              <a:t>Contratistas 1-5 ★</a:t>
+              <a:t>Contratistas 1 a 5 ★</a:t>
             </a:r>
           </a:p>
         </p:txBody>
@@ -4155,7 +4155,7 @@
               </a:defRPr>
             </a:pPr>
             <a:r>
-              <a:t>Cobros &amp; Liquidez</a:t>
+              <a:t>Ingresos vs. Gastos</a:t>
             </a:r>
           </a:p>
         </p:txBody>
@@ -4209,7 +4209,7 @@
               </a:defRPr>
             </a:pPr>
             <a:r>
-              <a:t>06. ACTAS &amp; CIERRE</a:t>
+              <a:t>06. ACTAS Y ENTREGA</a:t>
             </a:r>
           </a:p>
           <a:p>
@@ -4221,7 +4221,7 @@
               </a:defRPr>
             </a:pPr>
             <a:r>
-              <a:t>PDF + Punch List</a:t>
+              <a:t>PDF + Revisión final</a:t>
             </a:r>
           </a:p>
         </p:txBody>
@@ -4283,7 +4283,7 @@
               </a:defRPr>
             </a:pPr>
             <a:r>
-              <a:t>02 // VISTA EJECUTIVA DEL ESTUDIO</a:t>
+              <a:t>02 // VISTA GENERAL DE LA EMPRESA</a:t>
             </a:r>
           </a:p>
         </p:txBody>
@@ -4311,7 +4311,7 @@
           <a:lstStyle/>
           <a:p>
             <a:pPr>
-              <a:defRPr sz="2100" b="1">
+              <a:defRPr sz="2000" b="1">
                 <a:solidFill>
                   <a:srgbClr val="262320"/>
                 </a:solidFill>
@@ -4319,7 +4319,7 @@
               </a:defRPr>
             </a:pPr>
             <a:r>
-              <a:t>Portafolio Activo y 5 Widgets Ejecutivos en Tiempo Real</a:t>
+              <a:t>Portafolio de Proyectos y 5 Métricas Clave en Tiempo Real</a:t>
             </a:r>
           </a:p>
         </p:txBody>
@@ -4544,7 +4544,7 @@
               </a:defRPr>
             </a:pPr>
             <a:r>
-              <a:t>Control Ejecutivo desde la Primera Pantalla</a:t>
+              <a:t>Resumen Ejecutivo desde la Primera Pantalla</a:t>
             </a:r>
           </a:p>
           <a:p>
@@ -4560,7 +4560,7 @@
               </a:defRPr>
             </a:pPr>
             <a:r>
-              <a:t>▪  5 KPIs Simétricos en Tiempo Real: Proyectos Activos, Resumen de Cartera (Presupuesto vs. Ejecutado), Avance de Diseño (%), FF&amp;E por Aprobar (S/) e Hitos por Cobrar (S/).</a:t>
+              <a:t>▪  5 Métricas Clave en Tiempo Real: Proyectos Activos, Presupuesto Total Contratado (vs. monto ejecutado), Porcentaje de Avance de Diseño (%), Materiales por Aprobar (S/) y Pagos por Cobrar al Cliente (S/).</a:t>
             </a:r>
           </a:p>
           <a:p>
@@ -4576,7 +4576,7 @@
               </a:defRPr>
             </a:pPr>
             <a:r>
-              <a:t>▪  Filtro Inteligente por Proyecto: Permite ver el resumen de todo el estudio o aislar los números, cobros y FF&amp;E de un solo proyecto con un clic.</a:t>
+              <a:t>▪  Filtro Inteligente por Proyecto: Permite ver los números globales de toda la empresa o seleccionar un solo proyecto para ver al instante sus cobros y su lista de materiales.</a:t>
             </a:r>
           </a:p>
           <a:p>
@@ -4592,7 +4592,7 @@
               </a:defRPr>
             </a:pPr>
             <a:r>
-              <a:t>▪  Vista Unificada + Carpetas: Pestaña 'TODOS LOS PROYECTOS (5)' más carpetas por división (Comercial &amp; Hospitality, Residencial VIP, Residencial).</a:t>
+              <a:t>▪  Vista Unificada + Carpetas: Pestaña 'TODOS LOS PROYECTOS (5)' más carpetas por unidad de negocio (Comercial &amp; Hospitality, Residencial VIP, Residencial).</a:t>
             </a:r>
           </a:p>
           <a:p>
@@ -4608,7 +4608,7 @@
               </a:defRPr>
             </a:pPr>
             <a:r>
-              <a:t>▪  Tarjetas Desplegables por Estado: Agrupadas en En Proceso, Planificación y Completado con barra de avance y acceso directo al expediente.</a:t>
+              <a:t>▪  Tarjetas Desplegables por Estado: Proyectos agrupados en En Proceso, Planificación y Completado con barra de progreso y acceso directo a su expediente.</a:t>
             </a:r>
           </a:p>
         </p:txBody>
@@ -4708,7 +4708,7 @@
               </a:defRPr>
             </a:pPr>
             <a:r>
-              <a:t>Portafolio Principal y 5 KPIs Ejecutivos</a:t>
+              <a:t>Portafolio Principal y las 5 Métricas de la Empresa</a:t>
             </a:r>
           </a:p>
           <a:p>
@@ -4724,7 +4724,7 @@
               </a:defRPr>
             </a:pPr>
             <a:r>
-              <a:t>¿A qué tomarle screenshot en la app y pegarlo aquí?</a:t>
+              <a:t>¿Qué pantalla capturar en la app y pegar aquí?</a:t>
             </a:r>
           </a:p>
           <a:p>
@@ -4788,7 +4788,7 @@
               </a:defRPr>
             </a:pPr>
             <a:r>
-              <a:t>• Toma la captura abarcando los 5 KPIs superiores y la lista de proyectos.</a:t>
+              <a:t>• Toma la captura abarcando las 5 métricas superiores y la lista de proyectos.</a:t>
             </a:r>
           </a:p>
           <a:p>
@@ -4863,7 +4863,7 @@
               </a:defRPr>
             </a:pPr>
             <a:r>
-              <a:t>03 // RENTABILIDAD GLOBAL &amp; ESPECIALISTAS</a:t>
+              <a:t>03 // RENTABILIDAD GLOBAL Y PROVEEDORES</a:t>
             </a:r>
           </a:p>
         </p:txBody>
@@ -4891,7 +4891,7 @@
           <a:lstStyle/>
           <a:p>
             <a:pPr>
-              <a:defRPr sz="2100" b="1">
+              <a:defRPr sz="2000" b="1">
                 <a:solidFill>
                   <a:srgbClr val="262320"/>
                 </a:solidFill>
@@ -4899,7 +4899,7 @@
               </a:defRPr>
             </a:pPr>
             <a:r>
-              <a:t>Finanzas Consolidadas del Estudio y Directorio de Contratistas</a:t>
+              <a:t>Finanzas Consolidadas de la Empresa y Directorio de Contratistas</a:t>
             </a:r>
           </a:p>
         </p:txBody>
@@ -5124,7 +5124,7 @@
               </a:defRPr>
             </a:pPr>
             <a:r>
-              <a:t>Finanzas Consolidadas del Estudio</a:t>
+              <a:t>Finanzas Consolidadas de la Empresa</a:t>
             </a:r>
           </a:p>
           <a:p>
@@ -5140,7 +5140,7 @@
               </a:defRPr>
             </a:pPr>
             <a:r>
-              <a:t>▪  Calcula el Flujo de Caja Neto real: Total Cobrado − (Pagos Obra + Compras FF&amp;E + Caja Chica).</a:t>
+              <a:t>▪  Calcula la Liquidez Neta real: Total Cobrado a Clientes − (Pagos a Contratistas + Compra de Materiales + Gastos Menores).</a:t>
             </a:r>
           </a:p>
           <a:p>
@@ -5156,7 +5156,7 @@
               </a:defRPr>
             </a:pPr>
             <a:r>
-              <a:t>▪  Gráfico comparativo por proyecto (Presupuesto vs. Cobrado vs. Egresos) y exportación a CSV.</a:t>
+              <a:t>▪  Gráfico comparativo por proyecto (Presupuesto Contratado vs. Cobrado vs. Gastado) y descarga directa en Excel/CSV.</a:t>
             </a:r>
           </a:p>
         </p:txBody>
@@ -5256,7 +5256,7 @@
               </a:defRPr>
             </a:pPr>
             <a:r>
-              <a:t>Finanzas Consolidadas y Gráfico Comparativo</a:t>
+              <a:t>Finanzas de la Empresa y Gráfico Comparativo</a:t>
             </a:r>
           </a:p>
           <a:p>
@@ -5272,7 +5272,7 @@
               </a:defRPr>
             </a:pPr>
             <a:r>
-              <a:t>¿A qué tomarle screenshot en la app y pegarlo aquí?</a:t>
+              <a:t>¿Qué pantalla capturar en la app y pegar aquí?</a:t>
             </a:r>
           </a:p>
           <a:p>
@@ -5304,7 +5304,7 @@
               </a:defRPr>
             </a:pPr>
             <a:r>
-              <a:t>• Captura los 5 KPIs financieros, el gráfico de barras de los 5 proyectos y la tabla inferior.</a:t>
+              <a:t>• Captura las 5 métricas financieras, el gráfico de barras de los 5 proyectos y la tabla inferior.</a:t>
             </a:r>
           </a:p>
           <a:p>
@@ -5460,7 +5460,7 @@
               </a:defRPr>
             </a:pPr>
             <a:r>
-              <a:t>▪  Cruza las tareas activas para mostrar quién está '🔵 En Obra Hoy' o '🟢 Disponible' y su carga a 7 días.</a:t>
+              <a:t>▪  Cruza las tareas activas para mostrar quién está '🔵 En Obra Hoy' o '🟢 Disponible' y su carga de trabajo para los próximos 7 días.</a:t>
             </a:r>
           </a:p>
           <a:p>
@@ -5476,7 +5476,7 @@
               </a:defRPr>
             </a:pPr>
             <a:r>
-              <a:t>▪  Calificación en estrellas (⭐) y Bitácora Técnica histórica de Méritos [+] e Incidencias [-].</a:t>
+              <a:t>▪  Calificación en estrellas (⭐) e historial de desempeño con Puntos a Favor [+] e Incidencias [-].</a:t>
             </a:r>
           </a:p>
         </p:txBody>
@@ -5576,7 +5576,7 @@
               </a:defRPr>
             </a:pPr>
             <a:r>
-              <a:t>Directorio de Contratistas y Bitácora Técnica</a:t>
+              <a:t>Directorio de Contratistas y Calificación por Estrellas</a:t>
             </a:r>
           </a:p>
           <a:p>
@@ -5592,7 +5592,7 @@
               </a:defRPr>
             </a:pPr>
             <a:r>
-              <a:t>¿A qué tomarle screenshot en la app y pegarlo aquí?</a:t>
+              <a:t>¿Qué pantalla capturar en la app y pegar aquí?</a:t>
             </a:r>
           </a:p>
           <a:p>
@@ -5624,7 +5624,7 @@
               </a:defRPr>
             </a:pPr>
             <a:r>
-              <a:t>• Captura el directorio con estrellas ⭐ y la sección inferior 'Bitácora Técnica de Desempeño'.</a:t>
+              <a:t>• Captura el directorio con estrellas ⭐ y la sección inferior de historial de desempeño.</a:t>
             </a:r>
           </a:p>
           <a:p>
@@ -5727,7 +5727,7 @@
           <a:lstStyle/>
           <a:p>
             <a:pPr>
-              <a:defRPr sz="2100" b="1">
+              <a:defRPr sz="2000" b="1">
                 <a:solidFill>
                   <a:srgbClr val="262320"/>
                 </a:solidFill>
@@ -5735,7 +5735,7 @@
               </a:defRPr>
             </a:pPr>
             <a:r>
-              <a:t>Control Operativo Diario y Calendario Técnico Mensual</a:t>
+              <a:t>Control Operativo Diario y Calendario Mensual de Actividades</a:t>
             </a:r>
           </a:p>
         </p:txBody>
@@ -5960,7 +5960,7 @@
               </a:defRPr>
             </a:pPr>
             <a:r>
-              <a:t>Operación Diaria del Estudio sin Fricción</a:t>
+              <a:t>Operación Diaria del Equipo sin Fricciones</a:t>
             </a:r>
           </a:p>
           <a:p>
@@ -5976,7 +5976,7 @@
               </a:defRPr>
             </a:pPr>
             <a:r>
-              <a:t>▪  Columna 1 — Logística Diaria y Pendientes: Tareas rápidas asignadas por socio (Compras FF&amp;E, Pagos, Proveedores, Cliente) con cierre en un clic ('✓ LISTO').</a:t>
+              <a:t>▪  Columna 1 — Pendientes y Logística Diaria: Tareas rápidas asignadas por socio (Compras de materiales, Pagos, Proveedores, Clientes) con botón '✓ LISTO' al completarlas.</a:t>
             </a:r>
           </a:p>
           <a:p>
@@ -5992,7 +5992,7 @@
               </a:defRPr>
             </a:pPr>
             <a:r>
-              <a:t>▪  Columna 2 — En Ejecución (Hoy): Qué partidas constructivas y qué contratistas están activos hoy mismo en cada obra.</a:t>
+              <a:t>▪  Columna 2 — En Ejecución (Hoy): Qué trabajos de obra y qué contratistas están activos hoy mismo en cada proyecto.</a:t>
             </a:r>
           </a:p>
           <a:p>
@@ -6008,7 +6008,7 @@
               </a:defRPr>
             </a:pPr>
             <a:r>
-              <a:t>▪  Columna 3 — Próximos Arranques (7 Días): Alertas preventivas de inicios de obra para coordinar compras y accesos a tiempo.</a:t>
+              <a:t>▪  Columna 3 — Próximos Inicios (7 Días): Alertas preventivas de los trabajos que arrancan esta semana para coordinar compras y permisos a tiempo.</a:t>
             </a:r>
           </a:p>
           <a:p>
@@ -6024,7 +6024,7 @@
               </a:defRPr>
             </a:pPr>
             <a:r>
-              <a:t>▪  Calendario Técnico Mensual: Vista mensual completa donde cada actividad se pinta con el color del proyecto correspondiente.</a:t>
+              <a:t>▪  Calendario Mensual: Vista mensual completa donde cada actividad se pinta con el color del proyecto correspondiente.</a:t>
             </a:r>
           </a:p>
         </p:txBody>
@@ -6140,7 +6140,7 @@
               </a:defRPr>
             </a:pPr>
             <a:r>
-              <a:t>¿A qué tomarle screenshot en la app y pegarlo aquí?</a:t>
+              <a:t>¿Qué pantalla capturar en la app y pegar aquí?</a:t>
             </a:r>
           </a:p>
           <a:p>
@@ -6156,7 +6156,7 @@
               </a:defRPr>
             </a:pPr>
             <a:r>
-              <a:t>• Entra a la pestaña 'CONTROL OPERATIVO' (vista de 3 columnas operativas)</a:t>
+              <a:t>• Entra a la pestaña 'CONTROL OPERATIVO' (vista de 3 columnas de tareas diarias)</a:t>
             </a:r>
           </a:p>
           <a:p>
@@ -6263,7 +6263,7 @@
               </a:defRPr>
             </a:pPr>
             <a:r>
-              <a:t>05 // EXPEDIENTE INTEGRAL DE PROYECTO (MÓDULOS 01 Y 02)</a:t>
+              <a:t>05 // EXPEDIENTE DEL PROYECTO (MÓDULOS 01 Y 02)</a:t>
             </a:r>
           </a:p>
         </p:txBody>
@@ -6291,7 +6291,7 @@
           <a:lstStyle/>
           <a:p>
             <a:pPr>
-              <a:defRPr sz="2100" b="1">
+              <a:defRPr sz="2000" b="1">
                 <a:solidFill>
                   <a:srgbClr val="262320"/>
                 </a:solidFill>
@@ -6299,7 +6299,7 @@
               </a:defRPr>
             </a:pPr>
             <a:r>
-              <a:t>Resumen del Proyecto, Brief y Cronograma Gantt de las 8 Fases</a:t>
+              <a:t>Resumen del Proyecto, Requerimientos y Cronograma de las 8 Etapas</a:t>
             </a:r>
           </a:p>
         </p:txBody>
@@ -6524,7 +6524,7 @@
               </a:defRPr>
             </a:pPr>
             <a:r>
-              <a:t>8 Módulos Especializados por Proyecto</a:t>
+              <a:t>8 Módulos Especializados por cada Proyecto</a:t>
             </a:r>
           </a:p>
           <a:p>
@@ -6540,7 +6540,7 @@
               </a:defRPr>
             </a:pPr>
             <a:r>
-              <a:t>▪  Al abrir un proyecto (ej. 'Casa La Planicie'), se despliega su expediente completo en 8 pestañas.</a:t>
+              <a:t>▪  Al abrir un proyecto (ej. 'Casa La Planicie'), se despliega su expediente completo organizado en 8 pestañas.</a:t>
             </a:r>
           </a:p>
           <a:p>
@@ -6556,7 +6556,7 @@
               </a:defRPr>
             </a:pPr>
             <a:r>
-              <a:t>▪  01. Resumen &amp; Brief: 6 KPIs exclusivos del proyecto (Ppto. Total, Cobrado, Pagos Obra, Compras FF&amp;E, Saldo Caja Chica y % Fases), Ficha Técnica y Brief del cliente.</a:t>
+              <a:t>▪  01. Resumen General: 6 métricas financieras y de avance del proyecto (Presupuesto Total, Cobrado, Pagos Obra, Compra de Materiales, Saldo Caja Chica y % Etapas), datos técnicos y requerimientos del cliente.</a:t>
             </a:r>
           </a:p>
           <a:p>
@@ -6572,7 +6572,7 @@
               </a:defRPr>
             </a:pPr>
             <a:r>
-              <a:t>▪  02. Fases de Diseño: Las 8 etapas canónicas desde '01. Levantamiento &amp; Brief' hasta '08. Cierre &amp; Entrega Final'.</a:t>
+              <a:t>▪  02. Etapas de Diseño: Las 8 etapas paso a paso desde '01. Levantamiento Inicial' hasta '08. Cierre y Entrega Final'.</a:t>
             </a:r>
           </a:p>
           <a:p>
@@ -6588,7 +6588,7 @@
               </a:defRPr>
             </a:pPr>
             <a:r>
-              <a:t>▪  Incluye Diagrama Gantt interactivo por estado y casilla de validación 'Aprobado por Cliente'.</a:t>
+              <a:t>▪  Incluye un Cronograma Visual de barras por fechas y casilla de verificación 'Aprobado por Cliente'.</a:t>
             </a:r>
           </a:p>
         </p:txBody>
@@ -6688,7 +6688,7 @@
               </a:defRPr>
             </a:pPr>
             <a:r>
-              <a:t>Resumen del Proyecto o Diagrama Gantt de Diseño</a:t>
+              <a:t>Resumen del Proyecto o Cronograma Visual de Etapas</a:t>
             </a:r>
           </a:p>
           <a:p>
@@ -6704,7 +6704,7 @@
               </a:defRPr>
             </a:pPr>
             <a:r>
-              <a:t>¿A qué tomarle screenshot en la app y pegarlo aquí?</a:t>
+              <a:t>¿Qué pantalla capturar en la app y pegar aquí?</a:t>
             </a:r>
           </a:p>
           <a:p>
@@ -6736,7 +6736,7 @@
               </a:defRPr>
             </a:pPr>
             <a:r>
-              <a:t>• Toma la captura en '01. RESUMEN' (6 KPIs + Ficha Técnica + 8 barras de avance)</a:t>
+              <a:t>• Toma la captura en '01. RESUMEN' (6 métricas + Ficha Técnica + 8 barras de avance)</a:t>
             </a:r>
           </a:p>
           <a:p>
@@ -6752,7 +6752,7 @@
               </a:defRPr>
             </a:pPr>
             <a:r>
-              <a:t>• o en '02. FASES DE DISEÑO' (mostrando el Diagrama Gantt y la tabla inferior).</a:t>
+              <a:t>• o en '02. FASES DE DISEÑO' (mostrando el Cronograma Visual de barras y la tabla inferior).</a:t>
             </a:r>
           </a:p>
           <a:p>
@@ -6827,7 +6827,7 @@
               </a:defRPr>
             </a:pPr>
             <a:r>
-              <a:t>06 // EL CORAZÓN DEL DISEÑO INTERIOR (MÓDULOS 03 Y 04)</a:t>
+              <a:t>06 // CONTROL DE COMPRAS Y DOCUMENTOS (MÓDULOS 03 Y 04)</a:t>
             </a:r>
           </a:p>
         </p:txBody>
@@ -6855,7 +6855,7 @@
           <a:lstStyle/>
           <a:p>
             <a:pPr>
-              <a:defRPr sz="2100" b="1">
+              <a:defRPr sz="2000" b="1">
                 <a:solidFill>
                   <a:srgbClr val="262320"/>
                 </a:solidFill>
@@ -6863,7 +6863,7 @@
               </a:defRPr>
             </a:pPr>
             <a:r>
-              <a:t>Catálogo FF&amp;E por Ambiente y Control de Planos Técnicos</a:t>
+              <a:t>Presupuesto de Materiales y Mobiliario por Ambiente y Control de Planos</a:t>
             </a:r>
           </a:p>
         </p:txBody>
@@ -6918,7 +6918,7 @@
               </a:defRPr>
             </a:pPr>
             <a:r>
-              <a:t>Módulos: 03. FF&amp;E + 04. PLANOS</a:t>
+              <a:t>Módulos: 03. MATERIALES + 04. PLANOS</a:t>
             </a:r>
           </a:p>
         </p:txBody>
@@ -7088,7 +7088,7 @@
               </a:defRPr>
             </a:pPr>
             <a:r>
-              <a:t>Control Presupuestal FF&amp;E por Ambiente</a:t>
+              <a:t>Presupuesto de Materiales y Muebles por Habitación</a:t>
             </a:r>
           </a:p>
           <a:p>
@@ -7104,7 +7104,7 @@
               </a:defRPr>
             </a:pPr>
             <a:r>
-              <a:t>▪  03. Especificaciones FF&amp;E: Planilla especializada filtrable por Ambiente (Sala, Comedor, Cocina, Dormitorio Principal, Terraza) y Categoría (Mobiliario, Iluminación, Acabados).</a:t>
+              <a:t>▪  03. Materiales, Mobiliario y Acabados (pestaña FF&amp;E): Planilla interactiva filtrable por Ambiente (Sala, Comedor, Cocina, Dormitorio Principal, Terraza) y por Categoría (Muebles, Iluminación, Acabados).</a:t>
             </a:r>
           </a:p>
           <a:p>
@@ -7120,7 +7120,7 @@
               </a:defRPr>
             </a:pPr>
             <a:r>
-              <a:t>▪  Cálculo automático de Costo Estimado vs. Costo Real de compra, revelando el ahorro o sobrecosto por cada ambiente.</a:t>
+              <a:t>▪  Cálculo automático de Presupuesto Estimado vs. Costo Real de compra, mostrando el ahorro o sobrecosto en cada habitación.</a:t>
             </a:r>
           </a:p>
           <a:p>
@@ -7136,7 +7136,7 @@
               </a:defRPr>
             </a:pPr>
             <a:r>
-              <a:t>▪  Ciclo completo de procura: Propuesto → Cotizado → Aprobado Cliente → En Producción → Instalado.</a:t>
+              <a:t>▪  Seguimiento de cada compra: Propuesto → Cotizado → Aprobado por Cliente → En Fabricación → Instalado.</a:t>
             </a:r>
           </a:p>
           <a:p>
@@ -7152,7 +7152,7 @@
               </a:defRPr>
             </a:pPr>
             <a:r>
-              <a:t>▪  04. Entregables &amp; Planos: Control de revisiones (Rev 0, Rev A), aprobaciones y links a Drive.</a:t>
+              <a:t>▪  04. Entregables y Planos: Control de versiones de planos y vistas 3D, estado de aprobación y enlaces a la nube.</a:t>
             </a:r>
           </a:p>
         </p:txBody>
@@ -7252,7 +7252,7 @@
               </a:defRPr>
             </a:pPr>
             <a:r>
-              <a:t>Catálogo FF&amp;E y Desglose por Ambiente</a:t>
+              <a:t>Lista de Materiales y Desglose de Costos por Ambiente</a:t>
             </a:r>
           </a:p>
           <a:p>
@@ -7268,7 +7268,7 @@
               </a:defRPr>
             </a:pPr>
             <a:r>
-              <a:t>¿A qué tomarle screenshot en la app y pegarlo aquí?</a:t>
+              <a:t>¿Qué pantalla capturar en la app y pegar aquí?</a:t>
             </a:r>
           </a:p>
           <a:p>
@@ -7316,7 +7316,7 @@
               </a:defRPr>
             </a:pPr>
             <a:r>
-              <a:t>• Toma la captura mostrando los 4 KPIs, el desglose por ambiente y el catálogo FF&amp;E.</a:t>
+              <a:t>• Toma la captura mostrando las 4 métricas superiores, el resumen por habitación y el listado de materiales.</a:t>
             </a:r>
           </a:p>
           <a:p>
@@ -7419,7 +7419,7 @@
           <a:lstStyle/>
           <a:p>
             <a:pPr>
-              <a:defRPr sz="2100" b="1">
+              <a:defRPr sz="2000" b="1">
                 <a:solidFill>
                   <a:srgbClr val="262320"/>
                 </a:solidFill>
@@ -7427,7 +7427,7 @@
               </a:defRPr>
             </a:pPr>
             <a:r>
-              <a:t>Partidas de Obra, Hitos de Cobro, Actas en PDF y Punch List</a:t>
+              <a:t>Control de Obra, Hitos de Cobro, Actas en PDF y Revisión de Entrega</a:t>
             </a:r>
           </a:p>
         </p:txBody>
@@ -7652,7 +7652,7 @@
               </a:defRPr>
             </a:pPr>
             <a:r>
-              <a:t>05. Ejecución de Obra &amp; 06. Cobros / Caja Chica</a:t>
+              <a:t>05. Ejecución de Obra y 06. Cobros / Caja Chica</a:t>
             </a:r>
           </a:p>
           <a:p>
@@ -7668,7 +7668,7 @@
               </a:defRPr>
             </a:pPr>
             <a:r>
-              <a:t>▪  Control por partida constructiva con insignias en vivo de PACTADO / PAGADO / SALDO y sugeridor inteligente de contratistas disponibles.</a:t>
+              <a:t>▪  Control por rubro de obra (Demolición, Carpintería, Pintura) con indicadores de MONTO PACTADO / PAGADO / SALDO y sugeridor automático de contratistas disponibles.</a:t>
             </a:r>
           </a:p>
           <a:p>
@@ -7684,7 +7684,7 @@
               </a:defRPr>
             </a:pPr>
             <a:r>
-              <a:t>▪  Cronograma de hitos de cobro al cliente y registro rápido de Caja Chica de Obra.</a:t>
+              <a:t>▪  Cronograma de pagos del cliente y registro rápido de gastos menores (Caja Chica).</a:t>
             </a:r>
           </a:p>
         </p:txBody>
@@ -7784,7 +7784,7 @@
               </a:defRPr>
             </a:pPr>
             <a:r>
-              <a:t>Partidas de Obra y Saldos de Contratistas</a:t>
+              <a:t>Rubros de Obra y Control de Pagos a Contratistas</a:t>
             </a:r>
           </a:p>
           <a:p>
@@ -7800,7 +7800,7 @@
               </a:defRPr>
             </a:pPr>
             <a:r>
-              <a:t>¿A qué tomarle screenshot en la app y pegarlo aquí?</a:t>
+              <a:t>¿Qué pantalla capturar en la app y pegar aquí?</a:t>
             </a:r>
           </a:p>
           <a:p>
@@ -7832,7 +7832,7 @@
               </a:defRPr>
             </a:pPr>
             <a:r>
-              <a:t>• Captura las partidas con sus insignias PACTADO / PAGADO / SALDO y tareas.</a:t>
+              <a:t>• Captura los rubros de obra con sus etiquetas PACTADO / PAGADO / SALDO y tareas.</a:t>
             </a:r>
           </a:p>
           <a:p>
@@ -7972,7 +7972,7 @@
               </a:defRPr>
             </a:pPr>
             <a:r>
-              <a:t>07. Actas con Exportación PDF &amp; 08. Punch List</a:t>
+              <a:t>07. Actas en PDF Automático y 08. Revisión de Entrega</a:t>
             </a:r>
           </a:p>
           <a:p>
@@ -7988,7 +7988,7 @@
               </a:defRPr>
             </a:pPr>
             <a:r>
-              <a:t>▪  Importa notas de reunión / Google Meet para estructurar asistentes y acuerdos, generando un Acta PDF formal con membrete en un clic.</a:t>
+              <a:t>▪  Importa apuntes de reunión o Google Meet para ordenar asistentes y acuerdos, generando un Acta formal en PDF con membrete en un clic.</a:t>
             </a:r>
           </a:p>
           <a:p>
@@ -8004,7 +8004,7 @@
               </a:defRPr>
             </a:pPr>
             <a:r>
-              <a:t>▪  Punch List de inspección final por ambiente y prioridad previo a la entrega de obra.</a:t>
+              <a:t>▪  Módulo 08 (Punch List): Lista de observaciones y retoques finales por habitación antes de entregar la obra.</a:t>
             </a:r>
           </a:p>
         </p:txBody>
@@ -8104,7 +8104,7 @@
               </a:defRPr>
             </a:pPr>
             <a:r>
-              <a:t>Actas de Reunión (Exportar PDF) o Punch List</a:t>
+              <a:t>Actas de Reunión (Exportar a PDF) o Lista de Entrega</a:t>
             </a:r>
           </a:p>
           <a:p>
@@ -8120,7 +8120,7 @@
               </a:defRPr>
             </a:pPr>
             <a:r>
-              <a:t>¿A qué tomarle screenshot en la app y pegarlo aquí?</a:t>
+              <a:t>¿Qué pantalla capturar en la app y pegar aquí?</a:t>
             </a:r>
           </a:p>
           <a:p>
@@ -8152,7 +8152,7 @@
               </a:defRPr>
             </a:pPr>
             <a:r>
-              <a:t>• Captura la ficha del acta, las tablas de participantes/acuerdos y el botón '📥 EXPORTAR ACTA A PDF'.</a:t>
+              <a:t>• Captura la ficha de la reunión, las tablas de participantes/acuerdos y el botón '📥 EXPORTAR ACTA A PDF'.</a:t>
             </a:r>
           </a:p>
           <a:p>
@@ -8227,7 +8227,7 @@
               </a:defRPr>
             </a:pPr>
             <a:r>
-              <a:t>08 // TECNOLOGÍA &amp; VISIÓN ESTRATÉGICA</a:t>
+              <a:t>08 // TECNOLOGÍA Y VISIÓN ESTRATÉGICA</a:t>
             </a:r>
           </a:p>
         </p:txBody>
@@ -8255,7 +8255,7 @@
           <a:lstStyle/>
           <a:p>
             <a:pPr>
-              <a:defRPr sz="2100" b="1">
+              <a:defRPr sz="2000" b="1">
                 <a:solidFill>
                   <a:srgbClr val="262320"/>
                 </a:solidFill>
@@ -8318,7 +8318,7 @@
               </a:defRPr>
             </a:pPr>
             <a:r>
-              <a:t>LISTO PARA PRODUCCIÓN</a:t>
+              <a:t>LISTO PARA OPERAR</a:t>
             </a:r>
           </a:p>
         </p:txBody>
@@ -8488,7 +8488,7 @@
               </a:defRPr>
             </a:pPr>
             <a:r>
-              <a:t>Lo que ya está resuelto a nivel técnico (v2.0)</a:t>
+              <a:t>Lo que ya está resuelto y funcionando hoy (v2.0)</a:t>
             </a:r>
           </a:p>
           <a:p>
@@ -8504,7 +8504,7 @@
               </a:defRPr>
             </a:pPr>
             <a:r>
-              <a:t>▪  Base de Datos Híbrida Nube + Local: Conecta en tiempo real con Google Sheets y cuenta con soporte directo y fallback automático a archivos Excel (.xlsx) en Google Drive.</a:t>
+              <a:t>▪  Base de Datos en la Nube + Respaldo en Excel: Conecta en tiempo real con Google Sheets y cuenta con soporte directo para archivos Excel (.xlsx) en Google Drive.</a:t>
             </a:r>
           </a:p>
           <a:p>
@@ -8520,7 +8520,7 @@
               </a:defRPr>
             </a:pPr>
             <a:r>
-              <a:t>▪  Sincronización Inteligente (Hash MD5): Detecta exactamente qué tablas cambiaron ('● X cambios sin guardar') y sincroniza solo lo necesario.</a:t>
+              <a:t>▪  Guardado Inteligente de Cambios: El panel lateral detecta automáticamente qué tablas fueron editadas ('● X cambios sin guardar') y sincroniza solo lo necesario.</a:t>
             </a:r>
           </a:p>
           <a:p>
@@ -8536,7 +8536,7 @@
               </a:defRPr>
             </a:pPr>
             <a:r>
-              <a:t>▪  Identidad Visual 'Warm Architectural Atelier': Diseño limpio en tonos papel arquitectónico (#F7F4EF) y terracota (#C85A32), con grillas CSS simétricas adaptables a cualquier pantalla.</a:t>
+              <a:t>▪  Diseño Ejecutivo y Simétrico: Interfaz limpia en tonos cálidos (#F7F4EF y terracota #C85A32), adaptable a cualquier resolución de pantalla.</a:t>
             </a:r>
           </a:p>
           <a:p>
@@ -8552,7 +8552,7 @@
               </a:defRPr>
             </a:pPr>
             <a:r>
-              <a:t>▪  Multi-Socio Configurable: Nombres de directores/socios configurables desde el panel lateral sin depender de código fijo.</a:t>
+              <a:t>▪  Configuración Multi-Socio: Los nombres de los directores o socios se configuran libremente desde el panel lateral.</a:t>
             </a:r>
           </a:p>
           <a:p>
@@ -8568,7 +8568,7 @@
               </a:defRPr>
             </a:pPr>
             <a:r>
-              <a:t>▪  Calidad Asegurada: Arquitectura modular respaldada por 22 pruebas automatizadas (pytest) pasando al 100%.</a:t>
+              <a:t>▪  Calidad Verificada: Sistema respaldado por 22 pruebas automáticas que garantizan la exactitud de todos los cálculos financieros.</a:t>
             </a:r>
           </a:p>
         </p:txBody>
@@ -8711,7 +8711,7 @@
               </a:defRPr>
             </a:pPr>
             <a:r>
-              <a:t>▪  FASE 1 — Implementación Interna Inmediata (Mes 1): Cargar el 100% de los proyectos activos del estudio, estandarizando presupuestos FF&amp;E, control de contratistas y emisión de actas PDF para clientes.</a:t>
+              <a:t>▪  FASE 1 — Implementación Interna Inmediata (Mes 1): Gestionar el 100% de nuestros proyectos activos en la app, estandarizando presupuestos de materiales, control de contratistas y actas en PDF.</a:t>
             </a:r>
           </a:p>
           <a:p>
@@ -8727,7 +8727,7 @@
               </a:defRPr>
             </a:pPr>
             <a:r>
-              <a:t>▪  FASE 2 — Portal de Cliente &amp; Reportes Ejecutivos (Mes 2–3): Vista dedicada para que el cliente apruebe especificaciones FF&amp;E en línea y consulte su estado de cuenta y avance de fases.</a:t>
+              <a:t>▪  FASE 2 — Portal de Consulta para el Cliente (Mes 2–3): Habilitar una vista para que el cliente revise el avance de su proyecto en línea, apruebe compras de materiales y consulte su estado de cuenta.</a:t>
             </a:r>
           </a:p>
           <a:p>
@@ -8743,7 +8743,7 @@
               </a:defRPr>
             </a:pPr>
             <a:r>
-              <a:t>▪  FASE 3 — Escalabilidad Comercial como SaaS B2B (Mes 4+): Licenciamiento por suscripción mensual para estudios pequeños y medianos de arquitectura e interiorismo en Perú y Latinoamérica.</a:t>
+              <a:t>▪  FASE 3 — Escalabilidad como Software por Suscripción (Mes 4+): Comercializar el sistema mediante suscripción mensual para otros estudios de diseño, arquitectura y remodelación.</a:t>
             </a:r>
           </a:p>
         </p:txBody>
